--- a/Laboratories/Lab1/Intro_To_R_v2.pptx
+++ b/Laboratories/Lab1/Intro_To_R_v2.pptx
@@ -4913,6 +4913,49 @@
               <a:t>Extra argument to connect the points</a:t>
             </a:r>
             <a:endParaRPr lang="en-US" dirty="0"/>
+          </a:p>
+        </p:txBody>
+      </p:sp>
+      <p:sp>
+        <p:nvSpPr>
+          <p:cNvPr id="9" name="TextBox 8">
+            <a:extLst>
+              <a:ext uri="{FF2B5EF4-FFF2-40B4-BE49-F238E27FC236}">
+                <a16:creationId xmlns:a16="http://schemas.microsoft.com/office/drawing/2014/main" id="{3AB4D9A1-4E2E-8C13-6A2A-CEAAFFE4D616}"/>
+              </a:ext>
+            </a:extLst>
+          </p:cNvPr>
+          <p:cNvSpPr txBox="1"/>
+          <p:nvPr/>
+        </p:nvSpPr>
+        <p:spPr>
+          <a:xfrm>
+            <a:off x="7388391" y="6488668"/>
+            <a:ext cx="1755609" cy="369332"/>
+          </a:xfrm>
+          <a:prstGeom prst="rect">
+            <a:avLst/>
+          </a:prstGeom>
+          <a:noFill/>
+        </p:spPr>
+        <p:txBody>
+          <a:bodyPr wrap="none" rtlCol="0">
+            <a:spAutoFit/>
+          </a:bodyPr>
+          <a:lstStyle/>
+          <a:p>
+            <a:r>
+              <a:rPr lang="en-US" dirty="0" err="1">
+                <a:latin typeface="Times New Roman" panose="02020603050405020304" pitchFamily="18" charset="0"/>
+                <a:cs typeface="Times New Roman" panose="02020603050405020304" pitchFamily="18" charset="0"/>
+                <a:hlinkClick r:id="rId3"/>
+              </a:rPr>
+              <a:t>first_examples.R</a:t>
+            </a:r>
+            <a:endParaRPr lang="en-US" dirty="0">
+              <a:latin typeface="Times New Roman" panose="02020603050405020304" pitchFamily="18" charset="0"/>
+              <a:cs typeface="Times New Roman" panose="02020603050405020304" pitchFamily="18" charset="0"/>
+            </a:endParaRPr>
           </a:p>
         </p:txBody>
       </p:sp>
@@ -6419,10 +6462,10 @@
       </p:sp>
       <p:sp>
         <p:nvSpPr>
-          <p:cNvPr id="2" name="TextBox 1">
+          <p:cNvPr id="6" name="TextBox 5">
             <a:extLst>
               <a:ext uri="{FF2B5EF4-FFF2-40B4-BE49-F238E27FC236}">
-                <a16:creationId xmlns:a16="http://schemas.microsoft.com/office/drawing/2014/main" id="{C25688F7-A9A0-C534-A9D8-3C63030A881A}"/>
+                <a16:creationId xmlns:a16="http://schemas.microsoft.com/office/drawing/2014/main" id="{AC4430B2-EF28-40CD-52E2-3B537F2F3213}"/>
               </a:ext>
             </a:extLst>
           </p:cNvPr>
@@ -6431,7 +6474,7 @@
         </p:nvSpPr>
         <p:spPr>
           <a:xfrm>
-            <a:off x="7083591" y="5965205"/>
+            <a:off x="7165609" y="5955046"/>
             <a:ext cx="1755609" cy="369332"/>
           </a:xfrm>
           <a:prstGeom prst="rect">
@@ -6449,6 +6492,7 @@
               <a:rPr lang="en-US" dirty="0" err="1">
                 <a:latin typeface="Times New Roman" panose="02020603050405020304" pitchFamily="18" charset="0"/>
                 <a:cs typeface="Times New Roman" panose="02020603050405020304" pitchFamily="18" charset="0"/>
+                <a:hlinkClick r:id="rId3"/>
               </a:rPr>
               <a:t>first_examples.R</a:t>
             </a:r>
@@ -7510,6 +7554,49 @@
               </a:rPr>
               <a:t>)</a:t>
             </a:r>
+          </a:p>
+        </p:txBody>
+      </p:sp>
+      <p:sp>
+        <p:nvSpPr>
+          <p:cNvPr id="5" name="TextBox 4">
+            <a:extLst>
+              <a:ext uri="{FF2B5EF4-FFF2-40B4-BE49-F238E27FC236}">
+                <a16:creationId xmlns:a16="http://schemas.microsoft.com/office/drawing/2014/main" id="{A216FB91-8C35-A063-A6F7-2C1DE61165F5}"/>
+              </a:ext>
+            </a:extLst>
+          </p:cNvPr>
+          <p:cNvSpPr txBox="1"/>
+          <p:nvPr/>
+        </p:nvSpPr>
+        <p:spPr>
+          <a:xfrm>
+            <a:off x="7099273" y="6258288"/>
+            <a:ext cx="2044727" cy="369332"/>
+          </a:xfrm>
+          <a:prstGeom prst="rect">
+            <a:avLst/>
+          </a:prstGeom>
+          <a:noFill/>
+        </p:spPr>
+        <p:txBody>
+          <a:bodyPr wrap="none" rtlCol="0">
+            <a:spAutoFit/>
+          </a:bodyPr>
+          <a:lstStyle/>
+          <a:p>
+            <a:r>
+              <a:rPr lang="en-US" dirty="0" err="1">
+                <a:latin typeface="Times New Roman" panose="02020603050405020304" pitchFamily="18" charset="0"/>
+                <a:cs typeface="Times New Roman" panose="02020603050405020304" pitchFamily="18" charset="0"/>
+                <a:hlinkClick r:id="rId3"/>
+              </a:rPr>
+              <a:t>spreadsheet_load.R</a:t>
+            </a:r>
+            <a:endParaRPr lang="en-US" dirty="0">
+              <a:latin typeface="Times New Roman" panose="02020603050405020304" pitchFamily="18" charset="0"/>
+              <a:cs typeface="Times New Roman" panose="02020603050405020304" pitchFamily="18" charset="0"/>
+            </a:endParaRPr>
           </a:p>
         </p:txBody>
       </p:sp>
@@ -9019,6 +9106,49 @@
           </a:p>
         </p:txBody>
       </p:sp>
+      <p:sp>
+        <p:nvSpPr>
+          <p:cNvPr id="4" name="TextBox 3">
+            <a:extLst>
+              <a:ext uri="{FF2B5EF4-FFF2-40B4-BE49-F238E27FC236}">
+                <a16:creationId xmlns:a16="http://schemas.microsoft.com/office/drawing/2014/main" id="{BDE1AB1C-D33A-33F1-9C64-6A9E34220716}"/>
+              </a:ext>
+            </a:extLst>
+          </p:cNvPr>
+          <p:cNvSpPr txBox="1"/>
+          <p:nvPr/>
+        </p:nvSpPr>
+        <p:spPr>
+          <a:xfrm>
+            <a:off x="6870673" y="6029679"/>
+            <a:ext cx="2044727" cy="369332"/>
+          </a:xfrm>
+          <a:prstGeom prst="rect">
+            <a:avLst/>
+          </a:prstGeom>
+          <a:noFill/>
+        </p:spPr>
+        <p:txBody>
+          <a:bodyPr wrap="none" rtlCol="0">
+            <a:spAutoFit/>
+          </a:bodyPr>
+          <a:lstStyle/>
+          <a:p>
+            <a:r>
+              <a:rPr lang="en-US" dirty="0" err="1">
+                <a:latin typeface="Times New Roman" panose="02020603050405020304" pitchFamily="18" charset="0"/>
+                <a:cs typeface="Times New Roman" panose="02020603050405020304" pitchFamily="18" charset="0"/>
+                <a:hlinkClick r:id="rId3"/>
+              </a:rPr>
+              <a:t>spreadsheet_load.R</a:t>
+            </a:r>
+            <a:endParaRPr lang="en-US" dirty="0">
+              <a:latin typeface="Times New Roman" panose="02020603050405020304" pitchFamily="18" charset="0"/>
+              <a:cs typeface="Times New Roman" panose="02020603050405020304" pitchFamily="18" charset="0"/>
+            </a:endParaRPr>
+          </a:p>
+        </p:txBody>
+      </p:sp>
     </p:spTree>
     <p:extLst>
       <p:ext uri="{BB962C8B-B14F-4D97-AF65-F5344CB8AC3E}">
@@ -9633,6 +9763,7 @@
               <a:rPr lang="en-US" dirty="0" err="1">
                 <a:latin typeface="Times New Roman" panose="02020603050405020304" pitchFamily="18" charset="0"/>
                 <a:cs typeface="Times New Roman" panose="02020603050405020304" pitchFamily="18" charset="0"/>
+                <a:hlinkClick r:id="rId4"/>
               </a:rPr>
               <a:t>spreadsheet_load.R</a:t>
             </a:r>
@@ -10348,6 +10479,7 @@
               <a:rPr lang="en-US" dirty="0" err="1">
                 <a:latin typeface="Times New Roman" panose="02020603050405020304" pitchFamily="18" charset="0"/>
                 <a:cs typeface="Times New Roman" panose="02020603050405020304" pitchFamily="18" charset="0"/>
+                <a:hlinkClick r:id="rId3"/>
               </a:rPr>
               <a:t>install_a_package.R</a:t>
             </a:r>
@@ -12305,6 +12437,7 @@
               <a:rPr lang="en-US" dirty="0" err="1">
                 <a:latin typeface="Times New Roman" panose="02020603050405020304" pitchFamily="18" charset="0"/>
                 <a:cs typeface="Times New Roman" panose="02020603050405020304" pitchFamily="18" charset="0"/>
+                <a:hlinkClick r:id="rId3"/>
               </a:rPr>
               <a:t>install_course_package.R</a:t>
             </a:r>
@@ -15326,6 +15459,7 @@
               <a:rPr lang="en-US" dirty="0" err="1">
                 <a:latin typeface="Times New Roman" panose="02020603050405020304" pitchFamily="18" charset="0"/>
                 <a:cs typeface="Times New Roman" panose="02020603050405020304" pitchFamily="18" charset="0"/>
+                <a:hlinkClick r:id="rId3"/>
               </a:rPr>
               <a:t>basic_plotting.R</a:t>
             </a:r>
@@ -16149,6 +16283,7 @@
               <a:rPr lang="en-US" dirty="0" err="1">
                 <a:latin typeface="Times New Roman" panose="02020603050405020304" pitchFamily="18" charset="0"/>
                 <a:cs typeface="Times New Roman" panose="02020603050405020304" pitchFamily="18" charset="0"/>
+                <a:hlinkClick r:id="rId3"/>
               </a:rPr>
               <a:t>stripchart.R</a:t>
             </a:r>
@@ -17031,6 +17166,7 @@
               <a:rPr lang="en-US" dirty="0" err="1">
                 <a:latin typeface="Times New Roman" panose="02020603050405020304" pitchFamily="18" charset="0"/>
                 <a:cs typeface="Times New Roman" panose="02020603050405020304" pitchFamily="18" charset="0"/>
+                <a:hlinkClick r:id="rId3"/>
               </a:rPr>
               <a:t>loops_and_pie.R</a:t>
             </a:r>
@@ -18919,6 +19055,7 @@
               <a:rPr lang="en-US" dirty="0" err="1">
                 <a:latin typeface="Times New Roman" panose="02020603050405020304" pitchFamily="18" charset="0"/>
                 <a:cs typeface="Times New Roman" panose="02020603050405020304" pitchFamily="18" charset="0"/>
+                <a:hlinkClick r:id="rId3"/>
               </a:rPr>
               <a:t>nested_loops_and_stackedbar_plots.R</a:t>
             </a:r>
@@ -24288,6 +24425,49 @@
           </a:prstGeom>
         </p:spPr>
       </p:pic>
+      <p:sp>
+        <p:nvSpPr>
+          <p:cNvPr id="4" name="TextBox 3">
+            <a:extLst>
+              <a:ext uri="{FF2B5EF4-FFF2-40B4-BE49-F238E27FC236}">
+                <a16:creationId xmlns:a16="http://schemas.microsoft.com/office/drawing/2014/main" id="{C9F92BA2-ED8E-8803-1585-DE9C0909EB6C}"/>
+              </a:ext>
+            </a:extLst>
+          </p:cNvPr>
+          <p:cNvSpPr txBox="1"/>
+          <p:nvPr/>
+        </p:nvSpPr>
+        <p:spPr>
+          <a:xfrm>
+            <a:off x="7199899" y="3440446"/>
+            <a:ext cx="1755609" cy="369332"/>
+          </a:xfrm>
+          <a:prstGeom prst="rect">
+            <a:avLst/>
+          </a:prstGeom>
+          <a:noFill/>
+        </p:spPr>
+        <p:txBody>
+          <a:bodyPr wrap="none" rtlCol="0">
+            <a:spAutoFit/>
+          </a:bodyPr>
+          <a:lstStyle/>
+          <a:p>
+            <a:r>
+              <a:rPr lang="en-US" dirty="0" err="1">
+                <a:latin typeface="Times New Roman" panose="02020603050405020304" pitchFamily="18" charset="0"/>
+                <a:cs typeface="Times New Roman" panose="02020603050405020304" pitchFamily="18" charset="0"/>
+                <a:hlinkClick r:id="rId6"/>
+              </a:rPr>
+              <a:t>first_examples.R</a:t>
+            </a:r>
+            <a:endParaRPr lang="en-US" dirty="0">
+              <a:latin typeface="Times New Roman" panose="02020603050405020304" pitchFamily="18" charset="0"/>
+              <a:cs typeface="Times New Roman" panose="02020603050405020304" pitchFamily="18" charset="0"/>
+            </a:endParaRPr>
+          </a:p>
+        </p:txBody>
+      </p:sp>
     </p:spTree>
     <p:extLst>
       <p:ext uri="{BB962C8B-B14F-4D97-AF65-F5344CB8AC3E}">

--- a/Laboratories/Lab1/Intro_To_R_v2.pptx
+++ b/Laboratories/Lab1/Intro_To_R_v2.pptx
@@ -234,7 +234,7 @@
             <a:fld id="{E5C71FD9-B322-2549-9400-AF0C57474107}" type="datetimeFigureOut">
               <a:rPr lang="en-US" smtClean="0"/>
               <a:pPr/>
-              <a:t>1/5/26</a:t>
+              <a:t>2/5/26</a:t>
             </a:fld>
             <a:endParaRPr lang="en-US"/>
           </a:p>
@@ -941,7 +941,7 @@
             <a:fld id="{A3417F39-3343-D34D-887C-91D887A1DE4F}" type="datetimeFigureOut">
               <a:rPr lang="en-US" smtClean="0"/>
               <a:pPr/>
-              <a:t>1/5/26</a:t>
+              <a:t>2/5/26</a:t>
             </a:fld>
             <a:endParaRPr lang="en-US"/>
           </a:p>
@@ -1106,7 +1106,7 @@
             <a:fld id="{A3417F39-3343-D34D-887C-91D887A1DE4F}" type="datetimeFigureOut">
               <a:rPr lang="en-US" smtClean="0"/>
               <a:pPr/>
-              <a:t>1/5/26</a:t>
+              <a:t>2/5/26</a:t>
             </a:fld>
             <a:endParaRPr lang="en-US"/>
           </a:p>
@@ -1281,7 +1281,7 @@
             <a:fld id="{A3417F39-3343-D34D-887C-91D887A1DE4F}" type="datetimeFigureOut">
               <a:rPr lang="en-US" smtClean="0"/>
               <a:pPr/>
-              <a:t>1/5/26</a:t>
+              <a:t>2/5/26</a:t>
             </a:fld>
             <a:endParaRPr lang="en-US"/>
           </a:p>
@@ -1446,7 +1446,7 @@
             <a:fld id="{A3417F39-3343-D34D-887C-91D887A1DE4F}" type="datetimeFigureOut">
               <a:rPr lang="en-US" smtClean="0"/>
               <a:pPr/>
-              <a:t>1/5/26</a:t>
+              <a:t>2/5/26</a:t>
             </a:fld>
             <a:endParaRPr lang="en-US"/>
           </a:p>
@@ -1688,7 +1688,7 @@
             <a:fld id="{A3417F39-3343-D34D-887C-91D887A1DE4F}" type="datetimeFigureOut">
               <a:rPr lang="en-US" smtClean="0"/>
               <a:pPr/>
-              <a:t>1/5/26</a:t>
+              <a:t>2/5/26</a:t>
             </a:fld>
             <a:endParaRPr lang="en-US"/>
           </a:p>
@@ -1970,7 +1970,7 @@
             <a:fld id="{A3417F39-3343-D34D-887C-91D887A1DE4F}" type="datetimeFigureOut">
               <a:rPr lang="en-US" smtClean="0"/>
               <a:pPr/>
-              <a:t>1/5/26</a:t>
+              <a:t>2/5/26</a:t>
             </a:fld>
             <a:endParaRPr lang="en-US"/>
           </a:p>
@@ -2386,7 +2386,7 @@
             <a:fld id="{A3417F39-3343-D34D-887C-91D887A1DE4F}" type="datetimeFigureOut">
               <a:rPr lang="en-US" smtClean="0"/>
               <a:pPr/>
-              <a:t>1/5/26</a:t>
+              <a:t>2/5/26</a:t>
             </a:fld>
             <a:endParaRPr lang="en-US"/>
           </a:p>
@@ -2500,7 +2500,7 @@
             <a:fld id="{A3417F39-3343-D34D-887C-91D887A1DE4F}" type="datetimeFigureOut">
               <a:rPr lang="en-US" smtClean="0"/>
               <a:pPr/>
-              <a:t>1/5/26</a:t>
+              <a:t>2/5/26</a:t>
             </a:fld>
             <a:endParaRPr lang="en-US"/>
           </a:p>
@@ -2592,7 +2592,7 @@
             <a:fld id="{A3417F39-3343-D34D-887C-91D887A1DE4F}" type="datetimeFigureOut">
               <a:rPr lang="en-US" smtClean="0"/>
               <a:pPr/>
-              <a:t>1/5/26</a:t>
+              <a:t>2/5/26</a:t>
             </a:fld>
             <a:endParaRPr lang="en-US"/>
           </a:p>
@@ -2864,7 +2864,7 @@
             <a:fld id="{A3417F39-3343-D34D-887C-91D887A1DE4F}" type="datetimeFigureOut">
               <a:rPr lang="en-US" smtClean="0"/>
               <a:pPr/>
-              <a:t>1/5/26</a:t>
+              <a:t>2/5/26</a:t>
             </a:fld>
             <a:endParaRPr lang="en-US"/>
           </a:p>
@@ -3113,7 +3113,7 @@
             <a:fld id="{A3417F39-3343-D34D-887C-91D887A1DE4F}" type="datetimeFigureOut">
               <a:rPr lang="en-US" smtClean="0"/>
               <a:pPr/>
-              <a:t>1/5/26</a:t>
+              <a:t>2/5/26</a:t>
             </a:fld>
             <a:endParaRPr lang="en-US"/>
           </a:p>
@@ -3321,7 +3321,7 @@
             <a:fld id="{A3417F39-3343-D34D-887C-91D887A1DE4F}" type="datetimeFigureOut">
               <a:rPr lang="en-US" smtClean="0"/>
               <a:pPr/>
-              <a:t>1/5/26</a:t>
+              <a:t>2/5/26</a:t>
             </a:fld>
             <a:endParaRPr lang="en-US"/>
           </a:p>
@@ -7499,8 +7499,25 @@
                 <a:latin typeface="Courier"/>
                 <a:cs typeface="Courier"/>
               </a:rPr>
-              <a:t>, header = F)</a:t>
-            </a:r>
+              <a:t>, header </a:t>
+            </a:r>
+            <a:r>
+              <a:rPr lang="en-US" sz="1600">
+                <a:solidFill>
+                  <a:schemeClr val="bg1"/>
+                </a:solidFill>
+                <a:latin typeface="Courier"/>
+                <a:cs typeface="Courier"/>
+              </a:rPr>
+              <a:t>= T)</a:t>
+            </a:r>
+            <a:endParaRPr lang="en-US" sz="1600" dirty="0">
+              <a:solidFill>
+                <a:schemeClr val="bg1"/>
+              </a:solidFill>
+              <a:latin typeface="Courier"/>
+              <a:cs typeface="Courier"/>
+            </a:endParaRPr>
           </a:p>
           <a:p>
             <a:endParaRPr lang="en-US" sz="1600" dirty="0">
